--- a/docs/progress/slides/2026-10-22.pptx
+++ b/docs/progress/slides/2026-10-22.pptx
@@ -669,7 +669,7 @@
           <a:lstStyle/>
           <a:p>
             <a:r>
-              <a:t>先週、マイルストーンがあるとよいとコメントをもらったので作りました。今は M1、計測系が回るところで、期限は 11/5 です。修論の本体は実験1 までにして、実験2 は就活のあと、余裕があればやります。下が M1 の内訳で、左の 3 つは先週までに済んでいます。今週は M1-4 から M1-6 をやりました。</a:t>
+              <a:t>先週、マイルストーンがあるとよいとコメントをもらったので作りました。今は M1、計測系が回るところで、期限は 11/5 です。下が M1 の内訳で、左の 3 つは先週までに済んでいます。今週は M1-4 から M1-6 をやりました。</a:t>
             </a:r>
           </a:p>
         </p:txBody>
